--- a/你是配得(聖哉聖哉全地唱)(崇拜版).pptx
+++ b/你是配得(聖哉聖哉全地唱)(崇拜版).pptx
@@ -168,10 +168,9 @@
           <a:lstStyle/>
           <a:p>
             <a:r>
-              <a:rPr lang="zh-TW" altLang="en-US" smtClean="0"/>
+              <a:rPr lang="zh-TW" altLang="en-US"/>
               <a:t>按一下以編輯母片標題樣式</a:t>
             </a:r>
-            <a:endParaRPr lang="zh-TW" altLang="en-US"/>
           </a:p>
         </p:txBody>
       </p:sp>
@@ -287,10 +286,9 @@
           </a:lstStyle>
           <a:p>
             <a:r>
-              <a:rPr lang="zh-TW" altLang="en-US" smtClean="0"/>
+              <a:rPr lang="zh-TW" altLang="en-US"/>
               <a:t>按一下以編輯母片副標題樣式</a:t>
             </a:r>
-            <a:endParaRPr lang="zh-TW" altLang="en-US"/>
           </a:p>
         </p:txBody>
       </p:sp>
@@ -312,7 +310,7 @@
             <a:fld id="{1F1C68DF-E3D4-4B81-9D79-DED8BBF32A0E}" type="datetimeFigureOut">
               <a:rPr lang="zh-TW" altLang="en-US" smtClean="0"/>
               <a:pPr/>
-              <a:t>2022/4/2</a:t>
+              <a:t>2025/2/21</a:t>
             </a:fld>
             <a:endParaRPr lang="zh-TW" altLang="en-US"/>
           </a:p>
@@ -402,10 +400,9 @@
           <a:lstStyle/>
           <a:p>
             <a:r>
-              <a:rPr lang="zh-TW" altLang="en-US" smtClean="0"/>
+              <a:rPr lang="zh-TW" altLang="en-US"/>
               <a:t>按一下以編輯母片標題樣式</a:t>
             </a:r>
-            <a:endParaRPr lang="zh-TW" altLang="en-US"/>
           </a:p>
         </p:txBody>
       </p:sp>
@@ -426,38 +423,37 @@
           <a:p>
             <a:pPr lvl="0"/>
             <a:r>
-              <a:rPr lang="zh-TW" altLang="en-US" smtClean="0"/>
+              <a:rPr lang="zh-TW" altLang="en-US"/>
               <a:t>按一下以編輯母片文字樣式</a:t>
             </a:r>
           </a:p>
           <a:p>
             <a:pPr lvl="1"/>
             <a:r>
-              <a:rPr lang="zh-TW" altLang="en-US" smtClean="0"/>
+              <a:rPr lang="zh-TW" altLang="en-US"/>
               <a:t>第二層</a:t>
             </a:r>
           </a:p>
           <a:p>
             <a:pPr lvl="2"/>
             <a:r>
-              <a:rPr lang="zh-TW" altLang="en-US" smtClean="0"/>
+              <a:rPr lang="zh-TW" altLang="en-US"/>
               <a:t>第三層</a:t>
             </a:r>
           </a:p>
           <a:p>
             <a:pPr lvl="3"/>
             <a:r>
-              <a:rPr lang="zh-TW" altLang="en-US" smtClean="0"/>
+              <a:rPr lang="zh-TW" altLang="en-US"/>
               <a:t>第四層</a:t>
             </a:r>
           </a:p>
           <a:p>
             <a:pPr lvl="4"/>
             <a:r>
-              <a:rPr lang="zh-TW" altLang="en-US" smtClean="0"/>
+              <a:rPr lang="zh-TW" altLang="en-US"/>
               <a:t>第五層</a:t>
             </a:r>
-            <a:endParaRPr lang="zh-TW" altLang="en-US"/>
           </a:p>
         </p:txBody>
       </p:sp>
@@ -479,7 +475,7 @@
             <a:fld id="{1F1C68DF-E3D4-4B81-9D79-DED8BBF32A0E}" type="datetimeFigureOut">
               <a:rPr lang="zh-TW" altLang="en-US" smtClean="0"/>
               <a:pPr/>
-              <a:t>2022/4/2</a:t>
+              <a:t>2025/2/21</a:t>
             </a:fld>
             <a:endParaRPr lang="zh-TW" altLang="en-US"/>
           </a:p>
@@ -574,10 +570,9 @@
           <a:lstStyle/>
           <a:p>
             <a:r>
-              <a:rPr lang="zh-TW" altLang="en-US" smtClean="0"/>
+              <a:rPr lang="zh-TW" altLang="en-US"/>
               <a:t>按一下以編輯母片標題樣式</a:t>
             </a:r>
-            <a:endParaRPr lang="zh-TW" altLang="en-US"/>
           </a:p>
         </p:txBody>
       </p:sp>
@@ -603,38 +598,37 @@
           <a:p>
             <a:pPr lvl="0"/>
             <a:r>
-              <a:rPr lang="zh-TW" altLang="en-US" smtClean="0"/>
+              <a:rPr lang="zh-TW" altLang="en-US"/>
               <a:t>按一下以編輯母片文字樣式</a:t>
             </a:r>
           </a:p>
           <a:p>
             <a:pPr lvl="1"/>
             <a:r>
-              <a:rPr lang="zh-TW" altLang="en-US" smtClean="0"/>
+              <a:rPr lang="zh-TW" altLang="en-US"/>
               <a:t>第二層</a:t>
             </a:r>
           </a:p>
           <a:p>
             <a:pPr lvl="2"/>
             <a:r>
-              <a:rPr lang="zh-TW" altLang="en-US" smtClean="0"/>
+              <a:rPr lang="zh-TW" altLang="en-US"/>
               <a:t>第三層</a:t>
             </a:r>
           </a:p>
           <a:p>
             <a:pPr lvl="3"/>
             <a:r>
-              <a:rPr lang="zh-TW" altLang="en-US" smtClean="0"/>
+              <a:rPr lang="zh-TW" altLang="en-US"/>
               <a:t>第四層</a:t>
             </a:r>
           </a:p>
           <a:p>
             <a:pPr lvl="4"/>
             <a:r>
-              <a:rPr lang="zh-TW" altLang="en-US" smtClean="0"/>
+              <a:rPr lang="zh-TW" altLang="en-US"/>
               <a:t>第五層</a:t>
             </a:r>
-            <a:endParaRPr lang="zh-TW" altLang="en-US"/>
           </a:p>
         </p:txBody>
       </p:sp>
@@ -656,7 +650,7 @@
             <a:fld id="{1F1C68DF-E3D4-4B81-9D79-DED8BBF32A0E}" type="datetimeFigureOut">
               <a:rPr lang="zh-TW" altLang="en-US" smtClean="0"/>
               <a:pPr/>
-              <a:t>2022/4/2</a:t>
+              <a:t>2025/2/21</a:t>
             </a:fld>
             <a:endParaRPr lang="zh-TW" altLang="en-US"/>
           </a:p>
@@ -746,10 +740,9 @@
           <a:lstStyle/>
           <a:p>
             <a:r>
-              <a:rPr lang="zh-TW" altLang="en-US" smtClean="0"/>
+              <a:rPr lang="zh-TW" altLang="en-US"/>
               <a:t>按一下以編輯母片標題樣式</a:t>
             </a:r>
-            <a:endParaRPr lang="zh-TW" altLang="en-US"/>
           </a:p>
         </p:txBody>
       </p:sp>
@@ -770,38 +763,37 @@
           <a:p>
             <a:pPr lvl="0"/>
             <a:r>
-              <a:rPr lang="zh-TW" altLang="en-US" smtClean="0"/>
+              <a:rPr lang="zh-TW" altLang="en-US"/>
               <a:t>按一下以編輯母片文字樣式</a:t>
             </a:r>
           </a:p>
           <a:p>
             <a:pPr lvl="1"/>
             <a:r>
-              <a:rPr lang="zh-TW" altLang="en-US" smtClean="0"/>
+              <a:rPr lang="zh-TW" altLang="en-US"/>
               <a:t>第二層</a:t>
             </a:r>
           </a:p>
           <a:p>
             <a:pPr lvl="2"/>
             <a:r>
-              <a:rPr lang="zh-TW" altLang="en-US" smtClean="0"/>
+              <a:rPr lang="zh-TW" altLang="en-US"/>
               <a:t>第三層</a:t>
             </a:r>
           </a:p>
           <a:p>
             <a:pPr lvl="3"/>
             <a:r>
-              <a:rPr lang="zh-TW" altLang="en-US" smtClean="0"/>
+              <a:rPr lang="zh-TW" altLang="en-US"/>
               <a:t>第四層</a:t>
             </a:r>
           </a:p>
           <a:p>
             <a:pPr lvl="4"/>
             <a:r>
-              <a:rPr lang="zh-TW" altLang="en-US" smtClean="0"/>
+              <a:rPr lang="zh-TW" altLang="en-US"/>
               <a:t>第五層</a:t>
             </a:r>
-            <a:endParaRPr lang="zh-TW" altLang="en-US"/>
           </a:p>
         </p:txBody>
       </p:sp>
@@ -823,7 +815,7 @@
             <a:fld id="{1F1C68DF-E3D4-4B81-9D79-DED8BBF32A0E}" type="datetimeFigureOut">
               <a:rPr lang="zh-TW" altLang="en-US" smtClean="0"/>
               <a:pPr/>
-              <a:t>2022/4/2</a:t>
+              <a:t>2025/2/21</a:t>
             </a:fld>
             <a:endParaRPr lang="zh-TW" altLang="en-US"/>
           </a:p>
@@ -922,10 +914,9 @@
           </a:lstStyle>
           <a:p>
             <a:r>
-              <a:rPr lang="zh-TW" altLang="en-US" smtClean="0"/>
+              <a:rPr lang="zh-TW" altLang="en-US"/>
               <a:t>按一下以編輯母片標題樣式</a:t>
             </a:r>
-            <a:endParaRPr lang="zh-TW" altLang="en-US"/>
           </a:p>
         </p:txBody>
       </p:sp>
@@ -1042,7 +1033,7 @@
           <a:p>
             <a:pPr lvl="0"/>
             <a:r>
-              <a:rPr lang="zh-TW" altLang="en-US" smtClean="0"/>
+              <a:rPr lang="zh-TW" altLang="en-US"/>
               <a:t>按一下以編輯母片文字樣式</a:t>
             </a:r>
           </a:p>
@@ -1066,7 +1057,7 @@
             <a:fld id="{1F1C68DF-E3D4-4B81-9D79-DED8BBF32A0E}" type="datetimeFigureOut">
               <a:rPr lang="zh-TW" altLang="en-US" smtClean="0"/>
               <a:pPr/>
-              <a:t>2022/4/2</a:t>
+              <a:t>2025/2/21</a:t>
             </a:fld>
             <a:endParaRPr lang="zh-TW" altLang="en-US"/>
           </a:p>
@@ -1156,10 +1147,9 @@
           <a:lstStyle/>
           <a:p>
             <a:r>
-              <a:rPr lang="zh-TW" altLang="en-US" smtClean="0"/>
+              <a:rPr lang="zh-TW" altLang="en-US"/>
               <a:t>按一下以編輯母片標題樣式</a:t>
             </a:r>
-            <a:endParaRPr lang="zh-TW" altLang="en-US"/>
           </a:p>
         </p:txBody>
       </p:sp>
@@ -1213,38 +1203,37 @@
           <a:p>
             <a:pPr lvl="0"/>
             <a:r>
-              <a:rPr lang="zh-TW" altLang="en-US" smtClean="0"/>
+              <a:rPr lang="zh-TW" altLang="en-US"/>
               <a:t>按一下以編輯母片文字樣式</a:t>
             </a:r>
           </a:p>
           <a:p>
             <a:pPr lvl="1"/>
             <a:r>
-              <a:rPr lang="zh-TW" altLang="en-US" smtClean="0"/>
+              <a:rPr lang="zh-TW" altLang="en-US"/>
               <a:t>第二層</a:t>
             </a:r>
           </a:p>
           <a:p>
             <a:pPr lvl="2"/>
             <a:r>
-              <a:rPr lang="zh-TW" altLang="en-US" smtClean="0"/>
+              <a:rPr lang="zh-TW" altLang="en-US"/>
               <a:t>第三層</a:t>
             </a:r>
           </a:p>
           <a:p>
             <a:pPr lvl="3"/>
             <a:r>
-              <a:rPr lang="zh-TW" altLang="en-US" smtClean="0"/>
+              <a:rPr lang="zh-TW" altLang="en-US"/>
               <a:t>第四層</a:t>
             </a:r>
           </a:p>
           <a:p>
             <a:pPr lvl="4"/>
             <a:r>
-              <a:rPr lang="zh-TW" altLang="en-US" smtClean="0"/>
+              <a:rPr lang="zh-TW" altLang="en-US"/>
               <a:t>第五層</a:t>
             </a:r>
-            <a:endParaRPr lang="zh-TW" altLang="en-US"/>
           </a:p>
         </p:txBody>
       </p:sp>
@@ -1298,38 +1287,37 @@
           <a:p>
             <a:pPr lvl="0"/>
             <a:r>
-              <a:rPr lang="zh-TW" altLang="en-US" smtClean="0"/>
+              <a:rPr lang="zh-TW" altLang="en-US"/>
               <a:t>按一下以編輯母片文字樣式</a:t>
             </a:r>
           </a:p>
           <a:p>
             <a:pPr lvl="1"/>
             <a:r>
-              <a:rPr lang="zh-TW" altLang="en-US" smtClean="0"/>
+              <a:rPr lang="zh-TW" altLang="en-US"/>
               <a:t>第二層</a:t>
             </a:r>
           </a:p>
           <a:p>
             <a:pPr lvl="2"/>
             <a:r>
-              <a:rPr lang="zh-TW" altLang="en-US" smtClean="0"/>
+              <a:rPr lang="zh-TW" altLang="en-US"/>
               <a:t>第三層</a:t>
             </a:r>
           </a:p>
           <a:p>
             <a:pPr lvl="3"/>
             <a:r>
-              <a:rPr lang="zh-TW" altLang="en-US" smtClean="0"/>
+              <a:rPr lang="zh-TW" altLang="en-US"/>
               <a:t>第四層</a:t>
             </a:r>
           </a:p>
           <a:p>
             <a:pPr lvl="4"/>
             <a:r>
-              <a:rPr lang="zh-TW" altLang="en-US" smtClean="0"/>
+              <a:rPr lang="zh-TW" altLang="en-US"/>
               <a:t>第五層</a:t>
             </a:r>
-            <a:endParaRPr lang="zh-TW" altLang="en-US"/>
           </a:p>
         </p:txBody>
       </p:sp>
@@ -1351,7 +1339,7 @@
             <a:fld id="{1F1C68DF-E3D4-4B81-9D79-DED8BBF32A0E}" type="datetimeFigureOut">
               <a:rPr lang="zh-TW" altLang="en-US" smtClean="0"/>
               <a:pPr/>
-              <a:t>2022/4/2</a:t>
+              <a:t>2025/2/21</a:t>
             </a:fld>
             <a:endParaRPr lang="zh-TW" altLang="en-US"/>
           </a:p>
@@ -1445,10 +1433,9 @@
           </a:lstStyle>
           <a:p>
             <a:r>
-              <a:rPr lang="zh-TW" altLang="en-US" smtClean="0"/>
+              <a:rPr lang="zh-TW" altLang="en-US"/>
               <a:t>按一下以編輯母片標題樣式</a:t>
             </a:r>
-            <a:endParaRPr lang="zh-TW" altLang="en-US"/>
           </a:p>
         </p:txBody>
       </p:sp>
@@ -1511,7 +1498,7 @@
           <a:p>
             <a:pPr lvl="0"/>
             <a:r>
-              <a:rPr lang="zh-TW" altLang="en-US" smtClean="0"/>
+              <a:rPr lang="zh-TW" altLang="en-US"/>
               <a:t>按一下以編輯母片文字樣式</a:t>
             </a:r>
           </a:p>
@@ -1567,38 +1554,37 @@
           <a:p>
             <a:pPr lvl="0"/>
             <a:r>
-              <a:rPr lang="zh-TW" altLang="en-US" smtClean="0"/>
+              <a:rPr lang="zh-TW" altLang="en-US"/>
               <a:t>按一下以編輯母片文字樣式</a:t>
             </a:r>
           </a:p>
           <a:p>
             <a:pPr lvl="1"/>
             <a:r>
-              <a:rPr lang="zh-TW" altLang="en-US" smtClean="0"/>
+              <a:rPr lang="zh-TW" altLang="en-US"/>
               <a:t>第二層</a:t>
             </a:r>
           </a:p>
           <a:p>
             <a:pPr lvl="2"/>
             <a:r>
-              <a:rPr lang="zh-TW" altLang="en-US" smtClean="0"/>
+              <a:rPr lang="zh-TW" altLang="en-US"/>
               <a:t>第三層</a:t>
             </a:r>
           </a:p>
           <a:p>
             <a:pPr lvl="3"/>
             <a:r>
-              <a:rPr lang="zh-TW" altLang="en-US" smtClean="0"/>
+              <a:rPr lang="zh-TW" altLang="en-US"/>
               <a:t>第四層</a:t>
             </a:r>
           </a:p>
           <a:p>
             <a:pPr lvl="4"/>
             <a:r>
-              <a:rPr lang="zh-TW" altLang="en-US" smtClean="0"/>
+              <a:rPr lang="zh-TW" altLang="en-US"/>
               <a:t>第五層</a:t>
             </a:r>
-            <a:endParaRPr lang="zh-TW" altLang="en-US"/>
           </a:p>
         </p:txBody>
       </p:sp>
@@ -1661,7 +1647,7 @@
           <a:p>
             <a:pPr lvl="0"/>
             <a:r>
-              <a:rPr lang="zh-TW" altLang="en-US" smtClean="0"/>
+              <a:rPr lang="zh-TW" altLang="en-US"/>
               <a:t>按一下以編輯母片文字樣式</a:t>
             </a:r>
           </a:p>
@@ -1717,38 +1703,37 @@
           <a:p>
             <a:pPr lvl="0"/>
             <a:r>
-              <a:rPr lang="zh-TW" altLang="en-US" smtClean="0"/>
+              <a:rPr lang="zh-TW" altLang="en-US"/>
               <a:t>按一下以編輯母片文字樣式</a:t>
             </a:r>
           </a:p>
           <a:p>
             <a:pPr lvl="1"/>
             <a:r>
-              <a:rPr lang="zh-TW" altLang="en-US" smtClean="0"/>
+              <a:rPr lang="zh-TW" altLang="en-US"/>
               <a:t>第二層</a:t>
             </a:r>
           </a:p>
           <a:p>
             <a:pPr lvl="2"/>
             <a:r>
-              <a:rPr lang="zh-TW" altLang="en-US" smtClean="0"/>
+              <a:rPr lang="zh-TW" altLang="en-US"/>
               <a:t>第三層</a:t>
             </a:r>
           </a:p>
           <a:p>
             <a:pPr lvl="3"/>
             <a:r>
-              <a:rPr lang="zh-TW" altLang="en-US" smtClean="0"/>
+              <a:rPr lang="zh-TW" altLang="en-US"/>
               <a:t>第四層</a:t>
             </a:r>
           </a:p>
           <a:p>
             <a:pPr lvl="4"/>
             <a:r>
-              <a:rPr lang="zh-TW" altLang="en-US" smtClean="0"/>
+              <a:rPr lang="zh-TW" altLang="en-US"/>
               <a:t>第五層</a:t>
             </a:r>
-            <a:endParaRPr lang="zh-TW" altLang="en-US"/>
           </a:p>
         </p:txBody>
       </p:sp>
@@ -1770,7 +1755,7 @@
             <a:fld id="{1F1C68DF-E3D4-4B81-9D79-DED8BBF32A0E}" type="datetimeFigureOut">
               <a:rPr lang="zh-TW" altLang="en-US" smtClean="0"/>
               <a:pPr/>
-              <a:t>2022/4/2</a:t>
+              <a:t>2025/2/21</a:t>
             </a:fld>
             <a:endParaRPr lang="zh-TW" altLang="en-US"/>
           </a:p>
@@ -1860,10 +1845,9 @@
           <a:lstStyle/>
           <a:p>
             <a:r>
-              <a:rPr lang="zh-TW" altLang="en-US" smtClean="0"/>
+              <a:rPr lang="zh-TW" altLang="en-US"/>
               <a:t>按一下以編輯母片標題樣式</a:t>
             </a:r>
-            <a:endParaRPr lang="zh-TW" altLang="en-US"/>
           </a:p>
         </p:txBody>
       </p:sp>
@@ -1885,7 +1869,7 @@
             <a:fld id="{1F1C68DF-E3D4-4B81-9D79-DED8BBF32A0E}" type="datetimeFigureOut">
               <a:rPr lang="zh-TW" altLang="en-US" smtClean="0"/>
               <a:pPr/>
-              <a:t>2022/4/2</a:t>
+              <a:t>2025/2/21</a:t>
             </a:fld>
             <a:endParaRPr lang="zh-TW" altLang="en-US"/>
           </a:p>
@@ -1977,7 +1961,7 @@
             <a:fld id="{1F1C68DF-E3D4-4B81-9D79-DED8BBF32A0E}" type="datetimeFigureOut">
               <a:rPr lang="zh-TW" altLang="en-US" smtClean="0"/>
               <a:pPr/>
-              <a:t>2022/4/2</a:t>
+              <a:t>2025/2/21</a:t>
             </a:fld>
             <a:endParaRPr lang="zh-TW" altLang="en-US"/>
           </a:p>
@@ -2076,10 +2060,9 @@
           </a:lstStyle>
           <a:p>
             <a:r>
-              <a:rPr lang="zh-TW" altLang="en-US" smtClean="0"/>
+              <a:rPr lang="zh-TW" altLang="en-US"/>
               <a:t>按一下以編輯母片標題樣式</a:t>
             </a:r>
-            <a:endParaRPr lang="zh-TW" altLang="en-US"/>
           </a:p>
         </p:txBody>
       </p:sp>
@@ -2133,38 +2116,37 @@
           <a:p>
             <a:pPr lvl="0"/>
             <a:r>
-              <a:rPr lang="zh-TW" altLang="en-US" smtClean="0"/>
+              <a:rPr lang="zh-TW" altLang="en-US"/>
               <a:t>按一下以編輯母片文字樣式</a:t>
             </a:r>
           </a:p>
           <a:p>
             <a:pPr lvl="1"/>
             <a:r>
-              <a:rPr lang="zh-TW" altLang="en-US" smtClean="0"/>
+              <a:rPr lang="zh-TW" altLang="en-US"/>
               <a:t>第二層</a:t>
             </a:r>
           </a:p>
           <a:p>
             <a:pPr lvl="2"/>
             <a:r>
-              <a:rPr lang="zh-TW" altLang="en-US" smtClean="0"/>
+              <a:rPr lang="zh-TW" altLang="en-US"/>
               <a:t>第三層</a:t>
             </a:r>
           </a:p>
           <a:p>
             <a:pPr lvl="3"/>
             <a:r>
-              <a:rPr lang="zh-TW" altLang="en-US" smtClean="0"/>
+              <a:rPr lang="zh-TW" altLang="en-US"/>
               <a:t>第四層</a:t>
             </a:r>
           </a:p>
           <a:p>
             <a:pPr lvl="4"/>
             <a:r>
-              <a:rPr lang="zh-TW" altLang="en-US" smtClean="0"/>
+              <a:rPr lang="zh-TW" altLang="en-US"/>
               <a:t>第五層</a:t>
             </a:r>
-            <a:endParaRPr lang="zh-TW" altLang="en-US"/>
           </a:p>
         </p:txBody>
       </p:sp>
@@ -2227,7 +2209,7 @@
           <a:p>
             <a:pPr lvl="0"/>
             <a:r>
-              <a:rPr lang="zh-TW" altLang="en-US" smtClean="0"/>
+              <a:rPr lang="zh-TW" altLang="en-US"/>
               <a:t>按一下以編輯母片文字樣式</a:t>
             </a:r>
           </a:p>
@@ -2251,7 +2233,7 @@
             <a:fld id="{1F1C68DF-E3D4-4B81-9D79-DED8BBF32A0E}" type="datetimeFigureOut">
               <a:rPr lang="zh-TW" altLang="en-US" smtClean="0"/>
               <a:pPr/>
-              <a:t>2022/4/2</a:t>
+              <a:t>2025/2/21</a:t>
             </a:fld>
             <a:endParaRPr lang="zh-TW" altLang="en-US"/>
           </a:p>
@@ -2350,10 +2332,9 @@
           </a:lstStyle>
           <a:p>
             <a:r>
-              <a:rPr lang="zh-TW" altLang="en-US" smtClean="0"/>
+              <a:rPr lang="zh-TW" altLang="en-US"/>
               <a:t>按一下以編輯母片標題樣式</a:t>
             </a:r>
-            <a:endParaRPr lang="zh-TW" altLang="en-US"/>
           </a:p>
         </p:txBody>
       </p:sp>
@@ -2415,10 +2396,9 @@
           </a:lstStyle>
           <a:p>
             <a:r>
-              <a:rPr lang="zh-TW" altLang="en-US" smtClean="0"/>
+              <a:rPr lang="zh-TW" altLang="en-US"/>
               <a:t>按一下圖示以新增圖片</a:t>
             </a:r>
-            <a:endParaRPr lang="zh-TW" altLang="en-US"/>
           </a:p>
         </p:txBody>
       </p:sp>
@@ -2481,7 +2461,7 @@
           <a:p>
             <a:pPr lvl="0"/>
             <a:r>
-              <a:rPr lang="zh-TW" altLang="en-US" smtClean="0"/>
+              <a:rPr lang="zh-TW" altLang="en-US"/>
               <a:t>按一下以編輯母片文字樣式</a:t>
             </a:r>
           </a:p>
@@ -2505,7 +2485,7 @@
             <a:fld id="{1F1C68DF-E3D4-4B81-9D79-DED8BBF32A0E}" type="datetimeFigureOut">
               <a:rPr lang="zh-TW" altLang="en-US" smtClean="0"/>
               <a:pPr/>
-              <a:t>2022/4/2</a:t>
+              <a:t>2025/2/21</a:t>
             </a:fld>
             <a:endParaRPr lang="zh-TW" altLang="en-US"/>
           </a:p>
@@ -2615,10 +2595,9 @@
           <a:lstStyle/>
           <a:p>
             <a:r>
-              <a:rPr lang="zh-TW" altLang="en-US" smtClean="0"/>
+              <a:rPr lang="zh-TW" altLang="en-US"/>
               <a:t>按一下以編輯母片標題樣式</a:t>
             </a:r>
-            <a:endParaRPr lang="zh-TW" altLang="en-US"/>
           </a:p>
         </p:txBody>
       </p:sp>
@@ -2649,38 +2628,37 @@
           <a:p>
             <a:pPr lvl="0"/>
             <a:r>
-              <a:rPr lang="zh-TW" altLang="en-US" smtClean="0"/>
+              <a:rPr lang="zh-TW" altLang="en-US"/>
               <a:t>按一下以編輯母片文字樣式</a:t>
             </a:r>
           </a:p>
           <a:p>
             <a:pPr lvl="1"/>
             <a:r>
-              <a:rPr lang="zh-TW" altLang="en-US" smtClean="0"/>
+              <a:rPr lang="zh-TW" altLang="en-US"/>
               <a:t>第二層</a:t>
             </a:r>
           </a:p>
           <a:p>
             <a:pPr lvl="2"/>
             <a:r>
-              <a:rPr lang="zh-TW" altLang="en-US" smtClean="0"/>
+              <a:rPr lang="zh-TW" altLang="en-US"/>
               <a:t>第三層</a:t>
             </a:r>
           </a:p>
           <a:p>
             <a:pPr lvl="3"/>
             <a:r>
-              <a:rPr lang="zh-TW" altLang="en-US" smtClean="0"/>
+              <a:rPr lang="zh-TW" altLang="en-US"/>
               <a:t>第四層</a:t>
             </a:r>
           </a:p>
           <a:p>
             <a:pPr lvl="4"/>
             <a:r>
-              <a:rPr lang="zh-TW" altLang="en-US" smtClean="0"/>
+              <a:rPr lang="zh-TW" altLang="en-US"/>
               <a:t>第五層</a:t>
             </a:r>
-            <a:endParaRPr lang="zh-TW" altLang="en-US"/>
           </a:p>
         </p:txBody>
       </p:sp>
@@ -2720,7 +2698,7 @@
             <a:fld id="{1F1C68DF-E3D4-4B81-9D79-DED8BBF32A0E}" type="datetimeFigureOut">
               <a:rPr lang="zh-TW" altLang="en-US" smtClean="0"/>
               <a:pPr/>
-              <a:t>2022/4/2</a:t>
+              <a:t>2025/2/21</a:t>
             </a:fld>
             <a:endParaRPr lang="zh-TW" altLang="en-US"/>
           </a:p>
@@ -3128,7 +3106,7 @@
                 <a:latin typeface="微軟正黑體" pitchFamily="34" charset="-120"/>
                 <a:ea typeface="微軟正黑體" pitchFamily="34" charset="-120"/>
               </a:rPr>
-              <a:t>袮</a:t>
+              <a:t>祢</a:t>
             </a:r>
             <a:r>
               <a:rPr lang="zh-TW" altLang="en-US" sz="6600" b="1" i="1" dirty="0">
@@ -3145,41 +3123,7 @@
                 <a:latin typeface="微軟正黑體" pitchFamily="34" charset="-120"/>
                 <a:ea typeface="微軟正黑體" pitchFamily="34" charset="-120"/>
               </a:rPr>
-              <a:t>是配</a:t>
-            </a:r>
-            <a:r>
-              <a:rPr lang="zh-TW" altLang="en-US" sz="6600" b="1" i="1" dirty="0" smtClean="0">
-                <a:solidFill>
-                  <a:srgbClr val="000066"/>
-                </a:solidFill>
-                <a:effectLst>
-                  <a:outerShdw blurRad="38100" dist="38100" dir="2700000" algn="tl">
-                    <a:srgbClr val="000000">
-                      <a:alpha val="43137"/>
-                    </a:srgbClr>
-                  </a:outerShdw>
-                </a:effectLst>
-                <a:latin typeface="微軟正黑體" pitchFamily="34" charset="-120"/>
-                <a:ea typeface="微軟正黑體" pitchFamily="34" charset="-120"/>
-              </a:rPr>
-              <a:t>得（</a:t>
-            </a:r>
-            <a:r>
-              <a:rPr lang="zh-TW" altLang="en-US" sz="6600" b="1" i="1" dirty="0">
-                <a:solidFill>
-                  <a:srgbClr val="000066"/>
-                </a:solidFill>
-                <a:effectLst>
-                  <a:outerShdw blurRad="38100" dist="38100" dir="2700000" algn="tl">
-                    <a:srgbClr val="000000">
-                      <a:alpha val="43137"/>
-                    </a:srgbClr>
-                  </a:outerShdw>
-                </a:effectLst>
-                <a:latin typeface="微軟正黑體" pitchFamily="34" charset="-120"/>
-                <a:ea typeface="微軟正黑體" pitchFamily="34" charset="-120"/>
-              </a:rPr>
-              <a:t>聖哉聖哉全地唱）</a:t>
+              <a:t>是配得（聖哉聖哉全地唱）</a:t>
             </a:r>
           </a:p>
         </p:txBody>
@@ -3315,7 +3259,7 @@
                 <a:latin typeface="Microsoft JhengHei" panose="020B0604030504040204" pitchFamily="34" charset="-120"/>
                 <a:ea typeface="Microsoft JhengHei" panose="020B0604030504040204" pitchFamily="34" charset="-120"/>
               </a:rPr>
-              <a:t>正</a:t>
+              <a:t>正歌</a:t>
             </a:r>
             <a:r>
               <a:rPr lang="en-US" sz="4000" b="1" dirty="0">
@@ -3467,7 +3411,7 @@
                 <a:latin typeface="Microsoft JhengHei" panose="020B0604030504040204" pitchFamily="34" charset="-120"/>
                 <a:ea typeface="Microsoft JhengHei" panose="020B0604030504040204" pitchFamily="34" charset="-120"/>
               </a:rPr>
-              <a:t>正</a:t>
+              <a:t>正歌</a:t>
             </a:r>
             <a:r>
               <a:rPr lang="en-US" sz="4000" b="1" dirty="0">
@@ -3551,7 +3495,7 @@
                 <a:latin typeface="微軟正黑體" pitchFamily="34" charset="-120"/>
                 <a:ea typeface="微軟正黑體" pitchFamily="34" charset="-120"/>
               </a:rPr>
-              <a:t>袮</a:t>
+              <a:t>祢</a:t>
             </a:r>
             <a:r>
               <a:rPr lang="zh-TW" altLang="en-US" sz="6400" b="1" dirty="0">
@@ -3603,7 +3547,7 @@
                 <a:latin typeface="微軟正黑體" pitchFamily="34" charset="-120"/>
                 <a:ea typeface="微軟正黑體" pitchFamily="34" charset="-120"/>
               </a:rPr>
-              <a:t>袮</a:t>
+              <a:t>祢</a:t>
             </a:r>
             <a:r>
               <a:rPr lang="zh-TW" altLang="en-US" sz="6400" b="1" dirty="0">
@@ -3643,7 +3587,7 @@
                 <a:latin typeface="微軟正黑體" pitchFamily="34" charset="-120"/>
                 <a:ea typeface="微軟正黑體" pitchFamily="34" charset="-120"/>
               </a:rPr>
-              <a:t>袮</a:t>
+              <a:t>祢</a:t>
             </a:r>
             <a:endParaRPr lang="zh-TW" altLang="en-US" sz="6400" b="1" dirty="0">
               <a:solidFill>
@@ -3689,34 +3633,24 @@
               <a:t>( </a:t>
             </a:r>
             <a:r>
-              <a:rPr lang="zh-CN" altLang="en-US" sz="4000" b="1" dirty="0" smtClean="0">
+              <a:rPr lang="zh-CN" altLang="en-US" sz="4000" b="1" dirty="0">
                 <a:solidFill>
                   <a:srgbClr val="000066"/>
                 </a:solidFill>
                 <a:latin typeface="Microsoft JhengHei" panose="020B0604030504040204" pitchFamily="34" charset="-120"/>
                 <a:ea typeface="Microsoft JhengHei" panose="020B0604030504040204" pitchFamily="34" charset="-120"/>
               </a:rPr>
-              <a:t>副</a:t>
-            </a:r>
-            <a:r>
-              <a:rPr lang="en-US" sz="4000" b="1" dirty="0" smtClean="0">
+              <a:t>副歌</a:t>
+            </a:r>
+            <a:r>
+              <a:rPr lang="en-US" sz="4000" b="1" dirty="0">
                 <a:solidFill>
                   <a:srgbClr val="000066"/>
                 </a:solidFill>
                 <a:latin typeface="Microsoft JhengHei" panose="020B0604030504040204" pitchFamily="34" charset="-120"/>
                 <a:ea typeface="Microsoft JhengHei" panose="020B0604030504040204" pitchFamily="34" charset="-120"/>
               </a:rPr>
-              <a:t> </a:t>
-            </a:r>
-            <a:r>
-              <a:rPr lang="en-US" sz="4000" b="1" dirty="0">
-                <a:solidFill>
-                  <a:srgbClr val="000066"/>
-                </a:solidFill>
-                <a:latin typeface="Microsoft JhengHei" panose="020B0604030504040204" pitchFamily="34" charset="-120"/>
-                <a:ea typeface="Microsoft JhengHei" panose="020B0604030504040204" pitchFamily="34" charset="-120"/>
-              </a:rPr>
-              <a:t>)</a:t>
+              <a:t> )</a:t>
             </a:r>
             <a:endParaRPr lang="vi-VN" sz="4000" b="1" dirty="0">
               <a:solidFill>
@@ -3790,7 +3724,7 @@
                 <a:latin typeface="微軟正黑體" pitchFamily="34" charset="-120"/>
                 <a:ea typeface="微軟正黑體" pitchFamily="34" charset="-120"/>
               </a:rPr>
-              <a:t>袮</a:t>
+              <a:t>祢</a:t>
             </a:r>
             <a:r>
               <a:rPr lang="zh-TW" altLang="en-US" sz="6400" b="1" dirty="0">
@@ -3861,34 +3795,24 @@
               <a:t>( </a:t>
             </a:r>
             <a:r>
-              <a:rPr lang="zh-CN" altLang="en-US" sz="4000" b="1" dirty="0" smtClean="0">
+              <a:rPr lang="zh-CN" altLang="en-US" sz="4000" b="1" dirty="0">
                 <a:solidFill>
                   <a:srgbClr val="000066"/>
                 </a:solidFill>
                 <a:latin typeface="Microsoft JhengHei" panose="020B0604030504040204" pitchFamily="34" charset="-120"/>
                 <a:ea typeface="Microsoft JhengHei" panose="020B0604030504040204" pitchFamily="34" charset="-120"/>
               </a:rPr>
-              <a:t>副</a:t>
-            </a:r>
-            <a:r>
-              <a:rPr lang="en-US" sz="4000" b="1" dirty="0" smtClean="0">
+              <a:t>副歌</a:t>
+            </a:r>
+            <a:r>
+              <a:rPr lang="en-US" sz="4000" b="1" dirty="0">
                 <a:solidFill>
                   <a:srgbClr val="000066"/>
                 </a:solidFill>
                 <a:latin typeface="Microsoft JhengHei" panose="020B0604030504040204" pitchFamily="34" charset="-120"/>
                 <a:ea typeface="Microsoft JhengHei" panose="020B0604030504040204" pitchFamily="34" charset="-120"/>
               </a:rPr>
-              <a:t> </a:t>
-            </a:r>
-            <a:r>
-              <a:rPr lang="en-US" sz="4000" b="1" dirty="0">
-                <a:solidFill>
-                  <a:srgbClr val="000066"/>
-                </a:solidFill>
-                <a:latin typeface="Microsoft JhengHei" panose="020B0604030504040204" pitchFamily="34" charset="-120"/>
-                <a:ea typeface="Microsoft JhengHei" panose="020B0604030504040204" pitchFamily="34" charset="-120"/>
-              </a:rPr>
-              <a:t>)</a:t>
+              <a:t> )</a:t>
             </a:r>
             <a:endParaRPr lang="vi-VN" sz="4000" b="1" dirty="0">
               <a:solidFill>
@@ -3962,7 +3886,7 @@
                 <a:latin typeface="微軟正黑體" pitchFamily="34" charset="-120"/>
                 <a:ea typeface="微軟正黑體" pitchFamily="34" charset="-120"/>
               </a:rPr>
-              <a:t>袮</a:t>
+              <a:t>祢</a:t>
             </a:r>
             <a:r>
               <a:rPr lang="zh-TW" altLang="en-US" sz="6400" b="1" dirty="0">
@@ -4004,7 +3928,7 @@
                 <a:latin typeface="微軟正黑體" pitchFamily="34" charset="-120"/>
                 <a:ea typeface="微軟正黑體" pitchFamily="34" charset="-120"/>
               </a:rPr>
-              <a:t>袮</a:t>
+              <a:t>祢</a:t>
             </a:r>
             <a:endParaRPr lang="zh-TW" altLang="en-US" sz="6400" b="1" dirty="0">
               <a:solidFill>
@@ -4050,34 +3974,24 @@
               <a:t>( </a:t>
             </a:r>
             <a:r>
-              <a:rPr lang="zh-CN" altLang="en-US" sz="4000" b="1" dirty="0" smtClean="0">
+              <a:rPr lang="zh-CN" altLang="en-US" sz="4000" b="1" dirty="0">
                 <a:solidFill>
                   <a:srgbClr val="000066"/>
                 </a:solidFill>
                 <a:latin typeface="Microsoft JhengHei" panose="020B0604030504040204" pitchFamily="34" charset="-120"/>
                 <a:ea typeface="Microsoft JhengHei" panose="020B0604030504040204" pitchFamily="34" charset="-120"/>
               </a:rPr>
-              <a:t>副</a:t>
-            </a:r>
-            <a:r>
-              <a:rPr lang="en-US" sz="4000" b="1" dirty="0" smtClean="0">
+              <a:t>副歌</a:t>
+            </a:r>
+            <a:r>
+              <a:rPr lang="en-US" sz="4000" b="1" dirty="0">
                 <a:solidFill>
                   <a:srgbClr val="000066"/>
                 </a:solidFill>
                 <a:latin typeface="Microsoft JhengHei" panose="020B0604030504040204" pitchFamily="34" charset="-120"/>
                 <a:ea typeface="Microsoft JhengHei" panose="020B0604030504040204" pitchFamily="34" charset="-120"/>
               </a:rPr>
-              <a:t> </a:t>
-            </a:r>
-            <a:r>
-              <a:rPr lang="en-US" sz="4000" b="1" dirty="0">
-                <a:solidFill>
-                  <a:srgbClr val="000066"/>
-                </a:solidFill>
-                <a:latin typeface="Microsoft JhengHei" panose="020B0604030504040204" pitchFamily="34" charset="-120"/>
-                <a:ea typeface="Microsoft JhengHei" panose="020B0604030504040204" pitchFamily="34" charset="-120"/>
-              </a:rPr>
-              <a:t>)</a:t>
+              <a:t> )</a:t>
             </a:r>
             <a:endParaRPr lang="vi-VN" sz="4000" b="1" dirty="0">
               <a:solidFill>
@@ -4219,7 +4133,7 @@
               <a:t>( </a:t>
             </a:r>
             <a:r>
-              <a:rPr lang="zh-CN" altLang="en-US" sz="4000" b="1" dirty="0" smtClean="0">
+              <a:rPr lang="zh-CN" altLang="en-US" sz="4000" b="1" dirty="0">
                 <a:solidFill>
                   <a:srgbClr val="000066"/>
                 </a:solidFill>
@@ -4229,24 +4143,14 @@
               <a:t>橋</a:t>
             </a:r>
             <a:r>
-              <a:rPr lang="en-US" sz="4000" b="1" dirty="0" smtClean="0">
+              <a:rPr lang="en-US" sz="4000" b="1" dirty="0">
                 <a:solidFill>
                   <a:srgbClr val="000066"/>
                 </a:solidFill>
                 <a:latin typeface="Microsoft JhengHei" panose="020B0604030504040204" pitchFamily="34" charset="-120"/>
                 <a:ea typeface="Microsoft JhengHei" panose="020B0604030504040204" pitchFamily="34" charset="-120"/>
               </a:rPr>
-              <a:t> </a:t>
-            </a:r>
-            <a:r>
-              <a:rPr lang="en-US" sz="4000" b="1" dirty="0">
-                <a:solidFill>
-                  <a:srgbClr val="000066"/>
-                </a:solidFill>
-                <a:latin typeface="Microsoft JhengHei" panose="020B0604030504040204" pitchFamily="34" charset="-120"/>
-                <a:ea typeface="Microsoft JhengHei" panose="020B0604030504040204" pitchFamily="34" charset="-120"/>
-              </a:rPr>
-              <a:t>)</a:t>
+              <a:t> )</a:t>
             </a:r>
             <a:endParaRPr lang="vi-VN" sz="4000" b="1" dirty="0">
               <a:solidFill>
@@ -4381,7 +4285,7 @@
               <a:t>( </a:t>
             </a:r>
             <a:r>
-              <a:rPr lang="zh-CN" altLang="en-US" sz="4000" b="1" dirty="0" smtClean="0">
+              <a:rPr lang="zh-CN" altLang="en-US" sz="4000" b="1" dirty="0">
                 <a:solidFill>
                   <a:srgbClr val="000066"/>
                 </a:solidFill>
@@ -4391,24 +4295,14 @@
               <a:t>橋</a:t>
             </a:r>
             <a:r>
-              <a:rPr lang="en-US" sz="4000" b="1" dirty="0" smtClean="0">
+              <a:rPr lang="en-US" sz="4000" b="1" dirty="0">
                 <a:solidFill>
                   <a:srgbClr val="000066"/>
                 </a:solidFill>
                 <a:latin typeface="Microsoft JhengHei" panose="020B0604030504040204" pitchFamily="34" charset="-120"/>
                 <a:ea typeface="Microsoft JhengHei" panose="020B0604030504040204" pitchFamily="34" charset="-120"/>
               </a:rPr>
-              <a:t> </a:t>
-            </a:r>
-            <a:r>
-              <a:rPr lang="en-US" sz="4000" b="1" dirty="0">
-                <a:solidFill>
-                  <a:srgbClr val="000066"/>
-                </a:solidFill>
-                <a:latin typeface="Microsoft JhengHei" panose="020B0604030504040204" pitchFamily="34" charset="-120"/>
-                <a:ea typeface="Microsoft JhengHei" panose="020B0604030504040204" pitchFamily="34" charset="-120"/>
-              </a:rPr>
-              <a:t>)</a:t>
+              <a:t> )</a:t>
             </a:r>
             <a:endParaRPr lang="vi-VN" sz="4000" b="1" dirty="0">
               <a:solidFill>
